--- a/presentacion/Camara_BEV_hilos.pptx
+++ b/presentacion/Camara_BEV_hilos.pptx
@@ -4,6 +4,9 @@
   <p:sldMasterIdLst>
     <p:sldMasterId id="2147483648" r:id="rId1"/>
   </p:sldMasterIdLst>
+  <p:notesMasterIdLst>
+    <p:notesMasterId r:id="rId8"/>
+  </p:notesMasterIdLst>
   <p:sldIdLst>
     <p:sldId id="256" r:id="rId7"/>
     <p:sldId id="257" r:id="rId9"/>
@@ -21,7 +24,7 @@
     <p:sldId id="269" r:id="rId21"/>
     <p:sldId id="270" r:id="rId22"/>
   </p:sldIdLst>
-  <p:sldSz cx="12191695" cy="6858000" type="screen4x3"/>
+  <p:sldSz cx="12192000" cy="6858000" type="screen16x9"/>
   <p:notesSz cx="6858000" cy="9144000"/>
   <p:defaultTextStyle>
     <a:defPPr>
